--- a/decks/geog-landscapes/geog-landscapes_ch1_rocks-and-waves.pptx
+++ b/decks/geog-landscapes/geog-landscapes_ch1_rocks-and-waves.pptx
@@ -126,30 +126,30 @@
   <p:extLst>
     <p:ext uri="{521415D9-36F7-43E2-AB2F-B90AF26B5E84}">
       <p14:sectionLst xmlns:p14="http://schemas.microsoft.com/office/powerpoint/2010/main">
-        <p14:section name="Opening" id="{d4ef8274-972d-973d-753f-4abcf909d939}">
+        <p14:section name="Opening" id="{02c207a7-dc2e-0404-12e5-ec4b8a991c08}">
           <p14:sldIdLst>
             <p14:sldId id="256"/>
           </p14:sldIdLst>
         </p14:section>
-        <p14:section name="Gate" id="{473d3c7c-8231-df56-9eb2-3315bdb6f37e}">
+        <p14:section name="Gate" id="{339da473-c968-a191-bc6e-bcf9492e63f2}">
           <p14:sldIdLst>
             <p14:sldId id="257"/>
             <p14:sldId id="258"/>
           </p14:sldIdLst>
         </p14:section>
-        <p14:section name="Pre-teach" id="{5aa11ff0-b4b0-f5c2-f92c-7a7f21d87b5a}">
+        <p14:section name="Pre-teach" id="{47e3adef-48d1-2330-6b46-e19f566aa0fa}">
           <p14:sldIdLst>
             <p14:sldId id="259"/>
             <p14:sldId id="260"/>
           </p14:sldIdLst>
         </p14:section>
-        <p14:section name="Read-along" id="{21148a90-3efc-3d1c-a830-25d9a1a4f7a8}">
+        <p14:section name="Read-along" id="{2ae9a582-9f42-07b0-97d4-b904693177ea}">
           <p14:sldIdLst>
             <p14:sldId id="261"/>
             <p14:sldId id="262"/>
           </p14:sldIdLst>
         </p14:section>
-        <p14:section name="Teach" id="{3de239ef-5922-f53d-a043-75c9858a251a}">
+        <p14:section name="Teach" id="{f5865ab9-de31-84b1-a929-32537556cc36}">
           <p14:sldIdLst>
             <p14:sldId id="263"/>
             <p14:sldId id="264"/>
@@ -158,7 +158,7 @@
             <p14:sldId id="267"/>
           </p14:sldIdLst>
         </p14:section>
-        <p14:section name="Routes" id="{1c46c09d-adb0-332b-6abd-601d2de79697}">
+        <p14:section name="Routes" id="{c589d645-609b-4fad-baca-ccf2bafce5ee}">
           <p14:sldIdLst>
             <p14:sldId id="268"/>
             <p14:sldId id="269"/>
@@ -166,12 +166,12 @@
             <p14:sldId id="271"/>
           </p14:sldIdLst>
         </p14:section>
-        <p14:section name="Close" id="{8133f990-a14b-1c4d-5307-9fd3d9e3d60c}">
+        <p14:section name="Close" id="{c05dd47e-33b7-7c39-b297-30b60e2061ca}">
           <p14:sldIdLst>
             <p14:sldId id="272"/>
           </p14:sldIdLst>
         </p14:section>
-        <p14:section name="Answers" id="{6cd06c7b-e76d-318f-78b0-111fde5b335f}">
+        <p14:section name="Answers" id="{4f88c00c-0095-c6f3-2a5f-1e649452ac63}">
           <p14:sldIdLst>
             <p14:sldId id="273"/>
             <p14:sldId id="274"/>
@@ -1510,7 +1510,7 @@
             <a:r>
               <a:rPr lang="en-US" dirty="0"/>
               <a:t>Answers — task 2: Which wave built this beach?. Reveal the answer; pupils mark their own work in a different colour, then read the "why" together. Same destination for every lane, so one answer serves the whole class.
-Answer: A   Constructive waves, with a strong swash and weak backwash
+Answer: C   Constructive waves, with a strong swash and weak backwash
 Why: The beach is gaining sand, so deposition is happening. Constructive waves have a strong swash that carries sand up the beach and a weak backwash that leaves most of it there.
 Ask a Support pupil to explain one step, and a Stretch pupil to share their extension.</a:t>
             </a:r>
@@ -1603,7 +1603,7 @@
               <a:t>Do now — retrieval. Silent, no notes, no help: recall comes before any support. Give about four minutes.
 1. Which rock type forms the tors found on Dartmoor?  →  A   Granite
 2. Weathering is the breakdown of rock ___, without it being carried away.  →  in place
-3. Which pair of features describes a destructive wave?  →  A   Weak swash and strong backwash
+3. Which pair of features describes a destructive wave?  →  D   Weak swash and strong backwash
 Circulate: who gets 3/3 (Stretch route), 2/3 (Core), 0–1 (Support)? Use this to route pupils later in the lesson.</a:t>
             </a:r>
             <a:endParaRPr lang="en-US" dirty="0"/>
@@ -1786,7 +1786,7 @@
               <a:t>Answers — pupils mark their own in a different colour, then hands up for 3/3, 2/3, 1/3.
 1. A   Granite. Tors are blocks of hard granite left standing after weathering has attacked the joints around them. Dartmoor is the UK example.
 2. in place. Weathering happens in situ, in place. Once the pieces are carried away, that is erosion and transportation.
-3. A   Weak swash and strong backwash. A destructive wave's strong backwash drags more material down the beach than its weak swash brings up, so the beach is eroded.
+3. D   Weak swash and strong backwash. A destructive wave's strong backwash drags more material down the beach than its weak swash brings up, so the beach is eroded.
 Say the route each score points to: 3/3 Stretch, 2/3 Core, 0–1 Support. Pupils may choose to move up.</a:t>
             </a:r>
             <a:endParaRPr lang="en-US" dirty="0"/>
@@ -8726,7 +8726,7 @@
                 <a:ea typeface="Calibri" pitchFamily="34" charset="-122"/>
                 <a:cs typeface="Calibri" pitchFamily="34" charset="-120"/>
               </a:rPr>
-              <a:t>Constructive waves, with a strong swash and weak backwash</a:t>
+              <a:t>Destructive waves, with a strong swash and strong backwash</a:t>
             </a:r>
             <a:endParaRPr lang="en-US" sz="2600" dirty="0"/>
           </a:p>
@@ -8800,7 +8800,7 @@
                 <a:ea typeface="Calibri" pitchFamily="34" charset="-122"/>
                 <a:cs typeface="Calibri" pitchFamily="34" charset="-120"/>
               </a:rPr>
-              <a:t>Destructive waves, with a strong swash and strong backwash</a:t>
+              <a:t>Constructive waves, with a strong swash and weak backwash</a:t>
             </a:r>
             <a:endParaRPr lang="en-US" sz="2600" dirty="0"/>
           </a:p>
@@ -10238,7 +10238,7 @@
                 <a:ea typeface="Calibri" pitchFamily="34" charset="-122"/>
                 <a:cs typeface="Calibri" pitchFamily="34" charset="-120"/>
               </a:rPr>
-              <a:t>Chalk</a:t>
+              <a:t>Clay</a:t>
             </a:r>
             <a:endParaRPr lang="en-US" sz="2400" dirty="0"/>
           </a:p>
@@ -10275,7 +10275,7 @@
                 <a:ea typeface="Calibri" pitchFamily="34" charset="-122"/>
                 <a:cs typeface="Calibri" pitchFamily="34" charset="-120"/>
               </a:rPr>
-              <a:t>Clay</a:t>
+              <a:t>Carboniferous limestone</a:t>
             </a:r>
             <a:endParaRPr lang="en-US" sz="2400" dirty="0"/>
           </a:p>
@@ -10312,7 +10312,7 @@
                 <a:ea typeface="Calibri" pitchFamily="34" charset="-122"/>
                 <a:cs typeface="Calibri" pitchFamily="34" charset="-120"/>
               </a:rPr>
-              <a:t>Carboniferous limestone</a:t>
+              <a:t>Chalk</a:t>
             </a:r>
             <a:endParaRPr lang="en-US" sz="2400" dirty="0"/>
           </a:p>
@@ -11324,7 +11324,7 @@
                 <a:ea typeface="Cambria" pitchFamily="34" charset="-122"/>
                 <a:cs typeface="Cambria" pitchFamily="34" charset="-120"/>
               </a:rPr>
-              <a:t>A   Constructive waves, with a strong swash and weak backwash</a:t>
+              <a:t>C   Constructive waves, with a strong swash and weak backwash</a:t>
             </a:r>
             <a:endParaRPr lang="en-US" sz="1800" dirty="0"/>
           </a:p>
@@ -11895,7 +11895,7 @@
                 <a:ea typeface="Calibri" pitchFamily="34" charset="-122"/>
                 <a:cs typeface="Calibri" pitchFamily="34" charset="-120"/>
               </a:rPr>
-              <a:t>Chalk</a:t>
+              <a:t>Clay</a:t>
             </a:r>
             <a:endParaRPr lang="en-US" sz="2400" dirty="0"/>
           </a:p>
@@ -11932,7 +11932,7 @@
                 <a:ea typeface="Calibri" pitchFamily="34" charset="-122"/>
                 <a:cs typeface="Calibri" pitchFamily="34" charset="-120"/>
               </a:rPr>
-              <a:t>Clay</a:t>
+              <a:t>Carboniferous limestone</a:t>
             </a:r>
             <a:endParaRPr lang="en-US" sz="2400" dirty="0"/>
           </a:p>
@@ -11969,7 +11969,7 @@
                 <a:ea typeface="Calibri" pitchFamily="34" charset="-122"/>
                 <a:cs typeface="Calibri" pitchFamily="34" charset="-120"/>
               </a:rPr>
-              <a:t>Carboniferous limestone</a:t>
+              <a:t>Chalk</a:t>
             </a:r>
             <a:endParaRPr lang="en-US" sz="2400" dirty="0"/>
           </a:p>
@@ -12371,7 +12371,7 @@
                 <a:ea typeface="Calibri" pitchFamily="34" charset="-122"/>
                 <a:cs typeface="Calibri" pitchFamily="34" charset="-120"/>
               </a:rPr>
-              <a:t>Weak swash and strong backwash</a:t>
+              <a:t>Gentle gradient and strong swash</a:t>
             </a:r>
             <a:endParaRPr lang="en-US" sz="1800" dirty="0"/>
           </a:p>
@@ -12408,7 +12408,7 @@
                 <a:ea typeface="Calibri" pitchFamily="34" charset="-122"/>
                 <a:cs typeface="Calibri" pitchFamily="34" charset="-120"/>
               </a:rPr>
-              <a:t>Strong swash and weak backwash</a:t>
+              <a:t>Long wavelength and low height</a:t>
             </a:r>
             <a:endParaRPr lang="en-US" sz="1800" dirty="0"/>
           </a:p>
@@ -12445,7 +12445,7 @@
                 <a:ea typeface="Calibri" pitchFamily="34" charset="-122"/>
                 <a:cs typeface="Calibri" pitchFamily="34" charset="-120"/>
               </a:rPr>
-              <a:t>Long wavelength and low height</a:t>
+              <a:t>Strong swash and weak backwash</a:t>
             </a:r>
             <a:endParaRPr lang="en-US" sz="1800" dirty="0"/>
           </a:p>
@@ -12482,7 +12482,7 @@
                 <a:ea typeface="Calibri" pitchFamily="34" charset="-122"/>
                 <a:cs typeface="Calibri" pitchFamily="34" charset="-120"/>
               </a:rPr>
-              <a:t>Gentle gradient and strong swash</a:t>
+              <a:t>Weak swash and strong backwash</a:t>
             </a:r>
             <a:endParaRPr lang="en-US" sz="1800" dirty="0"/>
           </a:p>
@@ -13842,7 +13842,7 @@
                 <a:ea typeface="Calibri" pitchFamily="34" charset="-122"/>
                 <a:cs typeface="Calibri" pitchFamily="34" charset="-120"/>
               </a:rPr>
-              <a:t>A   Weak swash and strong backwash</a:t>
+              <a:t>D   Weak swash and strong backwash</a:t>
             </a:r>
             <a:endParaRPr lang="en-US" sz="2200" dirty="0"/>
           </a:p>

--- a/decks/geog-landscapes/geog-landscapes_ch1_rocks-and-waves.pptx
+++ b/decks/geog-landscapes/geog-landscapes_ch1_rocks-and-waves.pptx
@@ -126,30 +126,30 @@
   <p:extLst>
     <p:ext uri="{521415D9-36F7-43E2-AB2F-B90AF26B5E84}">
       <p14:sectionLst xmlns:p14="http://schemas.microsoft.com/office/powerpoint/2010/main">
-        <p14:section name="Opening" id="{02c207a7-dc2e-0404-12e5-ec4b8a991c08}">
+        <p14:section name="Opening" id="{1fc6842f-8ba2-4bd6-5782-f9f7ad552d21}">
           <p14:sldIdLst>
             <p14:sldId id="256"/>
           </p14:sldIdLst>
         </p14:section>
-        <p14:section name="Gate" id="{339da473-c968-a191-bc6e-bcf9492e63f2}">
+        <p14:section name="Gate" id="{5059d2eb-b674-7593-cb4e-5aee9a4d727f}">
           <p14:sldIdLst>
             <p14:sldId id="257"/>
             <p14:sldId id="258"/>
           </p14:sldIdLst>
         </p14:section>
-        <p14:section name="Pre-teach" id="{47e3adef-48d1-2330-6b46-e19f566aa0fa}">
+        <p14:section name="Pre-teach" id="{9efdbece-c673-9aaa-2ad4-a9cc58af2081}">
           <p14:sldIdLst>
             <p14:sldId id="259"/>
             <p14:sldId id="260"/>
           </p14:sldIdLst>
         </p14:section>
-        <p14:section name="Read-along" id="{2ae9a582-9f42-07b0-97d4-b904693177ea}">
+        <p14:section name="Read-along" id="{3edf0334-625f-f95e-dcf0-cdd48c96b833}">
           <p14:sldIdLst>
             <p14:sldId id="261"/>
             <p14:sldId id="262"/>
           </p14:sldIdLst>
         </p14:section>
-        <p14:section name="Teach" id="{f5865ab9-de31-84b1-a929-32537556cc36}">
+        <p14:section name="Teach" id="{5065b9e4-0ff4-42a8-9fdd-86f3ecfba667}">
           <p14:sldIdLst>
             <p14:sldId id="263"/>
             <p14:sldId id="264"/>
@@ -158,7 +158,7 @@
             <p14:sldId id="267"/>
           </p14:sldIdLst>
         </p14:section>
-        <p14:section name="Routes" id="{c589d645-609b-4fad-baca-ccf2bafce5ee}">
+        <p14:section name="Routes" id="{a99b1fc9-da11-40cd-f895-0de545c2214f}">
           <p14:sldIdLst>
             <p14:sldId id="268"/>
             <p14:sldId id="269"/>
@@ -166,12 +166,12 @@
             <p14:sldId id="271"/>
           </p14:sldIdLst>
         </p14:section>
-        <p14:section name="Close" id="{c05dd47e-33b7-7c39-b297-30b60e2061ca}">
+        <p14:section name="Close" id="{5fbeef3f-1eed-959d-e4d6-82a8a8f2d5ca}">
           <p14:sldIdLst>
             <p14:sldId id="272"/>
           </p14:sldIdLst>
         </p14:section>
-        <p14:section name="Answers" id="{4f88c00c-0095-c6f3-2a5f-1e649452ac63}">
+        <p14:section name="Answers" id="{a60f0f1e-35e1-670d-9682-01221a9cf1fc}">
           <p14:sldIdLst>
             <p14:sldId id="273"/>
             <p14:sldId id="274"/>
